--- a/metro/metro-x07-business-card-back.pptx
+++ b/metro/metro-x07-business-card-back.pptx
@@ -3382,9 +3382,9 @@
                 <a:solidFill>
                   <a:srgbClr val="2D5BE3"/>
                 </a:solidFill>
-                <a:latin typeface="Space Grotesk"/>
-                <a:ea typeface="Space Grotesk"/>
-                <a:cs typeface="Space Grotesk"/>
+                <a:latin typeface="HK Grotesk"/>
+                <a:ea typeface="HK Grotesk"/>
+                <a:cs typeface="HK Grotesk"/>
               </a:rPr>
               <a:t>NO</a:t>
             </a:r>
@@ -3421,9 +3421,9 @@
                 <a:solidFill>
                   <a:srgbClr val="FFFFFF"/>
                 </a:solidFill>
-                <a:latin typeface="Space Grotesk"/>
-                <a:ea typeface="Space Grotesk"/>
-                <a:cs typeface="Space Grotesk"/>
+                <a:latin typeface="HK Grotesk"/>
+                <a:ea typeface="HK Grotesk"/>
+                <a:cs typeface="HK Grotesk"/>
               </a:rPr>
               <a:t>North &amp; Oak</a:t>
             </a:r>
@@ -3456,9 +3456,9 @@
                 <a:solidFill>
                   <a:srgbClr val="C4C5C6"/>
                 </a:solidFill>
-                <a:latin typeface="Space Grotesk"/>
-                <a:ea typeface="Space Grotesk"/>
-                <a:cs typeface="Space Grotesk"/>
+                <a:latin typeface="HK Grotesk"/>
+                <a:ea typeface="HK Grotesk"/>
+                <a:cs typeface="HK Grotesk"/>
               </a:rPr>
               <a:t>Your place in the city.</a:t>
             </a:r>
